--- a/slides/Toan11/Slide_TOAN11_Bai2_T4-5.pptx
+++ b/slides/Toan11/Slide_TOAN11_Bai2_T4-5.pptx
@@ -4588,7 +4588,7 @@
                 </a:r>
                 <a:r>
                   <a:rPr lang="vi-VN"/>
-                  <a:t>\cos\ a\cos\ b=\frac{1}{2}[\cos\ (a-b)+\cos\ (a+b)]</a:t>
+                  <a:t>\cos\ a\cos\ b=\frac{1}{2}[\cos\ (a−b)+\cos\ (a+b)]</a:t>
                 </a:r>
               </a:p>
               <a:p>
@@ -4608,7 +4608,7 @@
                 </a:r>
                 <a:r>
                   <a:rPr lang="vi-VN"/>
-                  <a:t>\sin\ a\sin\ b=\frac{1}{2}[\cos\ (a-b)-\cos\ (a+b)]</a:t>
+                  <a:t>\sin\ a\sin\ b=\frac{1}{2}[\cos\ (a−b)−\cos\ (a+b)]</a:t>
                 </a:r>
               </a:p>
               <a:p>
@@ -4628,7 +4628,7 @@
                 </a:r>
                 <a:r>
                   <a:rPr lang="vi-VN"/>
-                  <a:t>\sin\ a\cos\ b=\frac{1}{2}[\sin\ (a-b)+\sin\ (a+b)]</a:t>
+                  <a:t>\sin\ a\cos\ b=\frac{1}{2}[\sin\ (a−b)+\sin\ (a+b)]</a:t>
                 </a:r>
               </a:p>
             </p:txBody>
@@ -5683,7 +5683,7 @@
                 </a:r>
                 <a:r>
                   <a:rPr lang="vi-VN"/>
-                  <a:t>\cos\ u+\cos\ v=2\cos\ \frac{u+v}{2}\cos\ \frac{u-v}{2}</a:t>
+                  <a:t>\cos\ u+\cos\ v=2\cos\ \frac{u+v}{2}\cos\ \frac{u−v}{2}</a:t>
                 </a:r>
               </a:p>
               <a:p>
@@ -5703,7 +5703,7 @@
                 </a:r>
                 <a:r>
                   <a:rPr lang="vi-VN"/>
-                  <a:t>\cos\ u-\cos\ v=-2\sin\ \frac{u+v}{2}\sin\ \frac{u-v}{2}</a:t>
+                  <a:t>\cos\ u−\cos\ v=−2\sin\ \frac{u+v}{2}\sin\ \frac{u−v}{2}</a:t>
                 </a:r>
               </a:p>
               <a:p>
@@ -5723,7 +5723,7 @@
                 </a:r>
                 <a:r>
                   <a:rPr lang="vi-VN"/>
-                  <a:t>\sin\ u+\sin\ v=2\sin\ \frac{u+v}{2}\cos\ \frac{u-v}{2}</a:t>
+                  <a:t>\sin\ u+\sin\ v=2\sin\ \frac{u+v}{2}\cos\ \frac{u−v}{2}</a:t>
                 </a:r>
               </a:p>
               <a:p>
@@ -5743,7 +5743,7 @@
                 </a:r>
                 <a:r>
                   <a:rPr lang="vi-VN"/>
-                  <a:t>\sin\ u-\sin\ v=2\cos\ \frac{u+v}{2}\sin\ \frac{u-v}{2}</a:t>
+                  <a:t>\sin\ u−\sin\ v=2\cos\ \frac{u+v}{2}\sin\ \frac{u−v}{2}</a:t>
                 </a:r>
               </a:p>
             </p:txBody>
@@ -6386,7 +6386,7 @@
                 </a:pPr>
                 <a:r>
                   <a:rPr lang="vi-VN"/>
-                  <a:t>A=\sin\ \frac{\pi}{9}-\sin\ \frac{4\pi}{9}+\sin\ \frac{7\pi}{9}</a:t>
+                  <a:t>A=\sin\ \frac{\pi}{9}−\sin\ \frac{4\pi}{9}+\sin\ \frac{7\pi}{9}</a:t>
                 </a:r>
               </a:p>
               <a:p>
@@ -6402,7 +6402,7 @@
                 </a:pPr>
                 <a:r>
                   <a:rPr lang="vi-VN"/>
-                  <a:t>=2\sin\ \frac{4\pi}{9}\cos\ \frac{\pi}{3}-\sin\ \frac{4\pi}{9}=0</a:t>
+                  <a:t>=2\sin\ \frac{4\pi}{9}\cos\ \frac{\pi}{3}−\sin\ \frac{4\pi}{9}=0</a:t>
                 </a:r>
               </a:p>
             </p:txBody>
@@ -7106,7 +7106,7 @@
                 </a:r>
                 <a:r>
                   <a:rPr lang="vi-VN"/>
-                  <a:t>\sin\ 5x-\sin\ 3x=2\sin\ 4x\cos\ x</a:t>
+                  <a:t>\sin\ 5x−\sin\ 3x=2\sin\ 4x\cos\ x</a:t>
                 </a:r>
               </a:p>
             </p:txBody>
@@ -7411,7 +7411,7 @@
                 </a:r>
                 <a:r>
                   <a:rPr lang="vi-VN"/>
-                  <a:t>\frac{\sqrt{6}-\sqrt{2}}{4}</a:t>
+                  <a:t>\frac{\sqrt{6}−\sqrt{2}}{4}</a:t>
                 </a:r>
                 <a:r>
                   <a:rPr sz="2400" b="1">
@@ -11642,7 +11642,7 @@
                 </a:r>
                 <a:r>
                   <a:rPr lang="vi-VN"/>
-                  <a:t>\tan\ (a+b)=\frac{\tan\ a+\tan\ b}{1-\tan\ a\tan\ b}</a:t>
+                  <a:t>\tan\ (a+b)=\frac{\tan\ a+\tan\ b}{1−\tan\ a\tan\ b}</a:t>
                 </a:r>
               </a:p>
               <a:p>
@@ -11662,7 +11662,7 @@
                 </a:r>
                 <a:r>
                   <a:rPr lang="vi-VN"/>
-                  <a:t>\tan\ (a-b)=\frac{\tan\ a-\tan\ b}{1+\tan\ a\tan\ b}</a:t>
+                  <a:t>\tan\ (a−b)=\frac{\tan\ a−\tan\ b}{1+\tan\ a\tan\ b}</a:t>
                 </a:r>
               </a:p>
             </p:txBody>
@@ -12207,7 +12207,7 @@
                     </m:r>
                     <m:d>
                       <m:dPr>
-                        <m:sepChr m:val="−"/>
+                        <m:sepChr m:val=""/>
                       </m:dPr>
                       <m:e>
                         <m:f>
@@ -12237,8 +12237,15 @@
                             </m:r>
                           </m:den>
                         </m:f>
-                      </m:e>
-                      <m:e>
+                        <m:r>
+                          <a:rPr lang="vi-VN" sz="2400" b="0">
+                            <a:solidFill>
+                              <a:srgbClr val="1E293B"/>
+                            </a:solidFill>
+                            <a:latin typeface="Cambria Math" panose="02040503050406030204" pitchFamily="18" charset="0"/>
+                          </a:rPr>
+                          <m:t>−</m:t>
+                        </m:r>
                         <m:f>
                           <m:fPr>
                             <m:type m:val="bar"/>
@@ -12335,7 +12342,7 @@
                 </a:pPr>
                 <a:r>
                   <a:rPr lang="vi-VN"/>
-                  <a:t>\cos\ 75^\circ=\cos\ (45^\circ+30^\circ)=\frac{\sqrt{6}-\sqrt{2}}{4}</a:t>
+                  <a:t>\cos\ 75^\circ=\cos\ (45^\circ+30^\circ)=\frac{\sqrt{6}−\sqrt{2}}{4}</a:t>
                 </a:r>
               </a:p>
               <a:p>
@@ -12351,7 +12358,7 @@
                 </a:pPr>
                 <a:r>
                   <a:rPr lang="vi-VN"/>
-                  <a:t>\tan\ \frac{\pi}{12}=\tan\ \left(\frac{\pi}{3}-\frac{\pi}{4}\right)=2-\sqrt{3}</a:t>
+                  <a:t>\tan\ \frac{\pi}{12}=\tan\ \left(\frac{\pi}{3}−\frac{\pi}{4}\right)=2−\sqrt{3}</a:t>
                 </a:r>
               </a:p>
             </p:txBody>
@@ -13774,7 +13781,7 @@
                 </a:r>
                 <a:r>
                   <a:rPr lang="vi-VN"/>
-                  <a:t>\sin^2a=\frac{1-\cos\ 2a}{2}</a:t>
+                  <a:t>\sin^2a=\frac{1−\cos\ 2a}{2}</a:t>
                 </a:r>
               </a:p>
             </p:txBody>
@@ -14379,7 +14386,7 @@
                 </a:r>
                 <a:r>
                   <a:rPr lang="vi-VN"/>
-                  <a:t>\cos\ 2a=\cos^2a-\sin^2a=2\cos^2a-1=1-2\sin^2a</a:t>
+                  <a:t>\cos\ 2a=\cos^2a−\sin^2a=2\cos^2a−1=1−2\sin^2a</a:t>
                 </a:r>
               </a:p>
               <a:p>
@@ -14399,7 +14406,7 @@
                 </a:r>
                 <a:r>
                   <a:rPr lang="vi-VN"/>
-                  <a:t>\tan\ 2a=\frac{2\tan\ a}{1-\tan^2a}</a:t>
+                  <a:t>\tan\ 2a=\frac{2\tan\ a}{1−\tan^2a}</a:t>
                 </a:r>
               </a:p>
             </p:txBody>
